--- a/presentation/HilalSamut-BIOMI6300.pptx
+++ b/presentation/HilalSamut-BIOMI6300.pptx
@@ -207,7 +207,7 @@
           <a:p>
             <a:fld id="{DBAA7864-226D-9146-9EAC-117471AC67E0}" type="datetimeFigureOut">
               <a:rPr lang="en-US" smtClean="0"/>
-              <a:t>4/29/25</a:t>
+              <a:t>4/30/25</a:t>
             </a:fld>
             <a:endParaRPr lang="en-US"/>
           </a:p>
@@ -5187,68 +5187,35 @@
       </p:grpSpPr>
       <p:sp>
         <p:nvSpPr>
-          <p:cNvPr id="2" name="Title 1">
-            <a:extLst>
-              <a:ext uri="{FF2B5EF4-FFF2-40B4-BE49-F238E27FC236}">
-                <a16:creationId xmlns:a16="http://schemas.microsoft.com/office/drawing/2014/main" id="{8192CD08-AF90-C1D7-874F-EA5DB3756073}"/>
-              </a:ext>
-            </a:extLst>
-          </p:cNvPr>
-          <p:cNvSpPr>
-            <a:spLocks noGrp="1"/>
-          </p:cNvSpPr>
-          <p:nvPr>
-            <p:ph type="title"/>
+          <p:cNvPr id="3" name="Content Placeholder 2">
+            <a:extLst>
+              <a:ext uri="{FF2B5EF4-FFF2-40B4-BE49-F238E27FC236}">
+                <a16:creationId xmlns:a16="http://schemas.microsoft.com/office/drawing/2014/main" id="{02783163-9638-EE31-E57C-F3393781B763}"/>
+              </a:ext>
+            </a:extLst>
+          </p:cNvPr>
+          <p:cNvSpPr>
+            <a:spLocks noGrp="1"/>
+          </p:cNvSpPr>
+          <p:nvPr>
+            <p:ph idx="1"/>
           </p:nvPr>
         </p:nvSpPr>
         <p:spPr>
           <a:xfrm>
-            <a:off x="0" y="225425"/>
-            <a:ext cx="10515600" cy="1325563"/>
-          </a:xfrm>
-        </p:spPr>
-        <p:txBody>
-          <a:bodyPr/>
-          <a:lstStyle/>
-          <a:p>
-            <a:r>
-              <a:rPr lang="en-US" dirty="0"/>
-              <a:t>Research Question</a:t>
-            </a:r>
-          </a:p>
-        </p:txBody>
-      </p:sp>
-      <p:sp>
-        <p:nvSpPr>
-          <p:cNvPr id="3" name="Content Placeholder 2">
-            <a:extLst>
-              <a:ext uri="{FF2B5EF4-FFF2-40B4-BE49-F238E27FC236}">
-                <a16:creationId xmlns:a16="http://schemas.microsoft.com/office/drawing/2014/main" id="{02783163-9638-EE31-E57C-F3393781B763}"/>
-              </a:ext>
-            </a:extLst>
-          </p:cNvPr>
-          <p:cNvSpPr>
-            <a:spLocks noGrp="1"/>
-          </p:cNvSpPr>
-          <p:nvPr>
-            <p:ph idx="1"/>
-          </p:nvPr>
-        </p:nvSpPr>
-        <p:spPr>
-          <a:xfrm>
-            <a:off x="0" y="1427162"/>
+            <a:off x="0" y="365125"/>
             <a:ext cx="5448300" cy="5430838"/>
           </a:xfrm>
         </p:spPr>
         <p:txBody>
           <a:bodyPr>
-            <a:normAutofit fontScale="92500" lnSpcReduction="20000"/>
+            <a:normAutofit/>
           </a:bodyPr>
           <a:lstStyle/>
           <a:p>
             <a:r>
               <a:rPr lang="en-US" dirty="0"/>
-              <a:t>Compare samples (n = 108):</a:t>
+              <a:t>Chopped Romaine samples (n = 108):</a:t>
             </a:r>
           </a:p>
           <a:p>
@@ -5259,65 +5226,25 @@
             </a:r>
           </a:p>
           <a:p>
+            <a:pPr lvl="1"/>
             <a:r>
               <a:rPr lang="en-US" dirty="0"/>
-              <a:t>How does the</a:t>
-            </a:r>
-            <a:r>
-              <a:rPr lang="en-US" b="1" dirty="0"/>
-              <a:t> microbial biodiversity</a:t>
-            </a:r>
+              <a:t>Harvest Season</a:t>
+            </a:r>
+          </a:p>
+          <a:p>
+            <a:pPr lvl="1"/>
             <a:r>
               <a:rPr lang="en-US" dirty="0"/>
-              <a:t> in chopped Romaine lettuce change during </a:t>
-            </a:r>
-            <a:r>
-              <a:rPr lang="en-US" b="1" dirty="0"/>
-              <a:t>storage </a:t>
-            </a:r>
+              <a:t>Brand</a:t>
+            </a:r>
+          </a:p>
+          <a:p>
+            <a:pPr lvl="1"/>
             <a:r>
               <a:rPr lang="en-US" dirty="0"/>
-              <a:t>beyond use by date (UBD)?</a:t>
-            </a:r>
-          </a:p>
-          <a:p>
-            <a:pPr lvl="1"/>
-            <a:r>
-              <a:rPr lang="en-US" b="1" dirty="0"/>
-              <a:t>Null hypothesis: </a:t>
-            </a:r>
-            <a:r>
-              <a:rPr lang="en-US" dirty="0"/>
-              <a:t>The microbial biodiversity doesn’t change during storage beyond UBD.</a:t>
-            </a:r>
-          </a:p>
-          <a:p>
-            <a:pPr lvl="1"/>
-            <a:r>
-              <a:rPr lang="en-US" b="1" dirty="0"/>
-              <a:t>Alternative Hypothesis:</a:t>
-            </a:r>
-            <a:r>
-              <a:rPr lang="en-US" b="0" i="0" u="none" strike="noStrike" dirty="0">
-                <a:effectLst/>
-                <a:latin typeface="Aptos" panose="020B0004020202020204" pitchFamily="34" charset="0"/>
-              </a:rPr>
-              <a:t> Microbial biodiversity, particularly in terms of dominant community members, increases in chopped Romaine stored beyond UBD.</a:t>
-            </a:r>
-            <a:r>
-              <a:rPr lang="en-US" dirty="0">
-                <a:latin typeface="Aptos" panose="020B0004020202020204" pitchFamily="34" charset="0"/>
-              </a:rPr>
-              <a:t> </a:t>
-            </a:r>
-            <a:r>
-              <a:rPr lang="en-US" b="0" i="0" u="none" strike="noStrike" dirty="0">
-                <a:effectLst/>
-                <a:latin typeface="Aptos" panose="020B0004020202020204" pitchFamily="34" charset="0"/>
-              </a:rPr>
-              <a:t>This increase is expected due to the decline of early-dominant taxa, allowing multiple microbial taxa to co-dominate during extended storage due to cold storage and limited nutrients.</a:t>
-            </a:r>
-            <a:endParaRPr lang="en-US" b="1" dirty="0"/>
+              <a:t>Inoculum</a:t>
+            </a:r>
           </a:p>
         </p:txBody>
       </p:sp>
@@ -5373,7 +5300,7 @@
           <a:lstStyle/>
           <a:p>
             <a:r>
-              <a:rPr lang="en-US"/>
+              <a:rPr lang="en-US" dirty="0"/>
               <a:t>Hilal Samut</a:t>
             </a:r>
           </a:p>
@@ -5405,6 +5332,96 @@
               <a:t>3</a:t>
             </a:fld>
             <a:endParaRPr lang="en-US"/>
+          </a:p>
+        </p:txBody>
+      </p:sp>
+      <p:sp>
+        <p:nvSpPr>
+          <p:cNvPr id="6" name="TextBox 5">
+            <a:extLst>
+              <a:ext uri="{FF2B5EF4-FFF2-40B4-BE49-F238E27FC236}">
+                <a16:creationId xmlns:a16="http://schemas.microsoft.com/office/drawing/2014/main" id="{DDFA067C-F29F-C627-29EF-E10D39DAC3E6}"/>
+              </a:ext>
+            </a:extLst>
+          </p:cNvPr>
+          <p:cNvSpPr txBox="1"/>
+          <p:nvPr/>
+        </p:nvSpPr>
+        <p:spPr>
+          <a:xfrm>
+            <a:off x="0" y="3164681"/>
+            <a:ext cx="5448300" cy="3693319"/>
+          </a:xfrm>
+          <a:prstGeom prst="rect">
+            <a:avLst/>
+          </a:prstGeom>
+          <a:noFill/>
+        </p:spPr>
+        <p:txBody>
+          <a:bodyPr wrap="square">
+            <a:spAutoFit/>
+          </a:bodyPr>
+          <a:lstStyle/>
+          <a:p>
+            <a:r>
+              <a:rPr lang="en-US" dirty="0"/>
+              <a:t>How does the</a:t>
+            </a:r>
+            <a:r>
+              <a:rPr lang="en-US" b="1" dirty="0"/>
+              <a:t> microbial biodiversity</a:t>
+            </a:r>
+            <a:r>
+              <a:rPr lang="en-US" dirty="0"/>
+              <a:t> in chopped Romaine lettuce change during </a:t>
+            </a:r>
+            <a:r>
+              <a:rPr lang="en-US" b="1" dirty="0"/>
+              <a:t>storage </a:t>
+            </a:r>
+            <a:r>
+              <a:rPr lang="en-US" dirty="0"/>
+              <a:t>beyond use by date (UBD)?</a:t>
+            </a:r>
+          </a:p>
+          <a:p>
+            <a:pPr lvl="1"/>
+            <a:r>
+              <a:rPr lang="en-US" b="1" dirty="0"/>
+              <a:t>Null hypothesis: </a:t>
+            </a:r>
+            <a:r>
+              <a:rPr lang="en-US" dirty="0"/>
+              <a:t>The microbial biodiversity doesn’t change during storage beyond UBD.</a:t>
+            </a:r>
+          </a:p>
+          <a:p>
+            <a:pPr lvl="1"/>
+            <a:r>
+              <a:rPr lang="en-US" b="1" dirty="0"/>
+              <a:t>Alternative Hypothesis:</a:t>
+            </a:r>
+            <a:r>
+              <a:rPr lang="en-US" b="0" i="0" u="none" strike="noStrike" dirty="0">
+                <a:effectLst/>
+                <a:latin typeface="Aptos" panose="020B0004020202020204" pitchFamily="34" charset="0"/>
+              </a:rPr>
+              <a:t> Microbial biodiversity, particularly in terms of dominant community members, increases in chopped Romaine stored beyond UBD.</a:t>
+            </a:r>
+            <a:r>
+              <a:rPr lang="en-US" dirty="0">
+                <a:latin typeface="Aptos" panose="020B0004020202020204" pitchFamily="34" charset="0"/>
+              </a:rPr>
+              <a:t> </a:t>
+            </a:r>
+            <a:r>
+              <a:rPr lang="en-US" b="0" i="0" u="none" strike="noStrike" dirty="0">
+                <a:effectLst/>
+                <a:latin typeface="Aptos" panose="020B0004020202020204" pitchFamily="34" charset="0"/>
+              </a:rPr>
+              <a:t>This increase is expected due to the decline of early-dominant taxa, allowing multiple microbial taxa to co-dominate during extended storage due to cold storage and limited nutrients.</a:t>
+            </a:r>
+            <a:endParaRPr lang="en-US" b="1" dirty="0"/>
           </a:p>
         </p:txBody>
       </p:sp>
@@ -5418,6 +5435,84 @@
   <p:clrMapOvr>
     <a:masterClrMapping/>
   </p:clrMapOvr>
+  <p:timing>
+    <p:tnLst>
+      <p:par>
+        <p:cTn id="1" dur="indefinite" restart="never" nodeType="tmRoot">
+          <p:childTnLst>
+            <p:seq concurrent="1" nextAc="seek">
+              <p:cTn id="2" dur="indefinite" nodeType="mainSeq">
+                <p:childTnLst>
+                  <p:par>
+                    <p:cTn id="3" fill="hold">
+                      <p:stCondLst>
+                        <p:cond delay="indefinite"/>
+                      </p:stCondLst>
+                      <p:childTnLst>
+                        <p:par>
+                          <p:cTn id="4" fill="hold">
+                            <p:stCondLst>
+                              <p:cond delay="0"/>
+                            </p:stCondLst>
+                            <p:childTnLst>
+                              <p:par>
+                                <p:cTn id="5" presetID="1" presetClass="entr" presetSubtype="0" fill="hold" grpId="0" nodeType="clickEffect">
+                                  <p:stCondLst>
+                                    <p:cond delay="0"/>
+                                  </p:stCondLst>
+                                  <p:childTnLst>
+                                    <p:set>
+                                      <p:cBhvr>
+                                        <p:cTn id="6" dur="1" fill="hold">
+                                          <p:stCondLst>
+                                            <p:cond delay="0"/>
+                                          </p:stCondLst>
+                                        </p:cTn>
+                                        <p:tgtEl>
+                                          <p:spTgt spid="6"/>
+                                        </p:tgtEl>
+                                        <p:attrNameLst>
+                                          <p:attrName>style.visibility</p:attrName>
+                                        </p:attrNameLst>
+                                      </p:cBhvr>
+                                      <p:to>
+                                        <p:strVal val="visible"/>
+                                      </p:to>
+                                    </p:set>
+                                  </p:childTnLst>
+                                </p:cTn>
+                              </p:par>
+                            </p:childTnLst>
+                          </p:cTn>
+                        </p:par>
+                      </p:childTnLst>
+                    </p:cTn>
+                  </p:par>
+                </p:childTnLst>
+              </p:cTn>
+              <p:prevCondLst>
+                <p:cond evt="onPrev" delay="0">
+                  <p:tgtEl>
+                    <p:sldTgt/>
+                  </p:tgtEl>
+                </p:cond>
+              </p:prevCondLst>
+              <p:nextCondLst>
+                <p:cond evt="onNext" delay="0">
+                  <p:tgtEl>
+                    <p:sldTgt/>
+                  </p:tgtEl>
+                </p:cond>
+              </p:nextCondLst>
+            </p:seq>
+          </p:childTnLst>
+        </p:cTn>
+      </p:par>
+    </p:tnLst>
+    <p:bldLst>
+      <p:bldP spid="6" grpId="0"/>
+    </p:bldLst>
+  </p:timing>
 </p:sld>
 </file>
 

--- a/presentation/HilalSamut-BIOMI6300.pptx
+++ b/presentation/HilalSamut-BIOMI6300.pptx
@@ -7216,7 +7216,7 @@
         <p:spPr>
           <a:xfrm>
             <a:off x="5829301" y="2488311"/>
-            <a:ext cx="6098058" cy="2410916"/>
+            <a:ext cx="6098058" cy="2133918"/>
           </a:xfrm>
           <a:prstGeom prst="rect">
             <a:avLst/>
@@ -7253,21 +7253,7 @@
                 <a:effectLst/>
                 <a:latin typeface="Aptos" panose="020B0004020202020204" pitchFamily="34" charset="0"/>
               </a:rPr>
-              <a:t>showed a notable increase with extended storage (UBD5). While </a:t>
-            </a:r>
-            <a:r>
-              <a:rPr lang="en-US" b="0" i="0" u="none" strike="noStrike" dirty="0" err="1">
-                <a:effectLst/>
-                <a:latin typeface="Aptos" panose="020B0004020202020204" pitchFamily="34" charset="0"/>
-              </a:rPr>
-              <a:t>Bacillota</a:t>
-            </a:r>
-            <a:r>
-              <a:rPr lang="en-US" b="0" i="0" u="none" strike="noStrike" dirty="0">
-                <a:effectLst/>
-                <a:latin typeface="Aptos" panose="020B0004020202020204" pitchFamily="34" charset="0"/>
-              </a:rPr>
-              <a:t> appeared relatively stable across storage durations at the phylum level, </a:t>
+              <a:t>showed a notable increase with extended storage (UBD5). </a:t>
             </a:r>
             <a:r>
               <a:rPr lang="en-US" b="0" i="1" u="none" strike="noStrike" dirty="0" err="1">
